--- a/docs/ppt/析知XiZhi-作品介绍-v2.pptx
+++ b/docs/ppt/析知XiZhi-作品介绍-v2.pptx
@@ -6668,7 +6668,7 @@
                 </a:solidFill>
                 <a:latin typeface="思源黑体 CN"/>
               </a:rPr>
-              <a:t>629 条里 462 条是重复</a:t>
+              <a:t>213 条里 67 条是真重复</a:t>
             </a:r>
             <a:endParaRPr sz="2400" b="1">
               <a:solidFill>
@@ -6713,7 +6713,7 @@
                 </a:solidFill>
                 <a:latin typeface="思源黑体 CN"/>
               </a:rPr>
-              <a:t>同一份材料被抽了 4 遍，每遍追加、没去重。</a:t>
+              <a:t>**根因已修**：章内序号曾被当成全局序号（详见第 7 页）。</a:t>
             </a:r>
             <a:endParaRPr sz="1600" b="0">
               <a:solidFill>
@@ -6804,8 +6804,7 @@
                 </a:solidFill>
                 <a:latin typeface="思源黑体 CN"/>
               </a:rPr>
-              <a:t>处置：只改口径（167 个不同内容），
-去重排到功能冻结之后单独立项。</a:t>
+              <a:t>处置：**根因已修 + 重跑**（副本 483→67）；剩下的 67 个是材料的真实重复，**只标注不去重**。</a:t>
             </a:r>
             <a:endParaRPr sz="1600" b="0">
               <a:solidFill>
@@ -13983,7 +13982,7 @@
                 </a:solidFill>
                 <a:latin typeface="JetBrains Mono"/>
               </a:rPr>
-              <a:t>629</a:t>
+              <a:t>213</a:t>
             </a:r>
             <a:endParaRPr sz="6600" b="1">
               <a:solidFill>
@@ -14028,7 +14027,7 @@
                 </a:solidFill>
                 <a:latin typeface="思源黑体 CN"/>
               </a:rPr>
-              <a:t>条抽取条目</a:t>
+              <a:t>个知识点</a:t>
             </a:r>
             <a:endParaRPr sz="1800" b="0">
               <a:solidFill>
@@ -14073,7 +14072,7 @@
                 </a:solidFill>
                 <a:latin typeface="JetBrains Mono"/>
               </a:rPr>
-              <a:t>167</a:t>
+              <a:t>146</a:t>
             </a:r>
             <a:endParaRPr sz="6600" b="1">
               <a:solidFill>
@@ -14163,7 +14162,7 @@
                 </a:solidFill>
                 <a:latin typeface="JetBrains Mono"/>
               </a:rPr>
-              <a:t>95</a:t>
+              <a:t>23</a:t>
             </a:r>
             <a:endParaRPr sz="6600" b="1">
               <a:solidFill>
@@ -14208,7 +14207,7 @@
                 </a:solidFill>
                 <a:latin typeface="思源黑体 CN"/>
               </a:rPr>
-              <a:t>条知识点形态</a:t>
+              <a:t>条硬前置边</a:t>
             </a:r>
             <a:endParaRPr sz="1800" b="0">
               <a:solidFill>
@@ -14343,7 +14342,7 @@
                 </a:solidFill>
                 <a:latin typeface="思源黑体 CN"/>
               </a:rPr>
-              <a:t>⚠️  「629」不能单独讲 —— 它是**抽取条目数**，不是知识点数。</a:t>
+              <a:t>**213 个知识点** —— 其中 **67 个是同内容的真重复**（材料本来就有，我们标注不去重）。</a:t>
             </a:r>
             <a:endParaRPr sz="1700" b="0">
               <a:solidFill>
@@ -14365,7 +14364,7 @@
                 </a:solidFill>
                 <a:latin typeface="思源黑体 CN"/>
               </a:rPr>
-              <a:t>同一份材料被抽了 4 遍，每遍追加、没去重；按正文指纹去重后是 167 条。</a:t>
+              <a:t>**根因已修**：抽取器把「章内序号」当成了全局序号，导致同一批块被多个节各抽一遍 —— 重跑后副本从 483 降到 67。</a:t>
             </a:r>
             <a:endParaRPr sz="1700" b="0">
               <a:solidFill>
@@ -14432,7 +14431,7 @@
                 </a:solidFill>
                 <a:latin typeface="思源黑体 CN"/>
               </a:rPr>
-              <a:t>口径已写进 PPT 素材文档；去重排到功能冻结之后，单独立项。</a:t>
+              <a:t>**剩下那 67 个是材料的真实重复** —— 我们**只标注、不删数据**。</a:t>
             </a:r>
             <a:endParaRPr sz="1600" b="0">
               <a:solidFill>
